--- a/dist/초1/정보·AI/기기와절차/초1_정보·AI_기기와절차_01_디지털기기와순서.pptx
+++ b/dist/초1/정보·AI/기기와절차/초1_정보·AI_기기와절차_01_디지털기기와순서.pptx
@@ -120,20 +120,20 @@
   <p:extLst>
     <p:ext uri="{521415D9-36F7-43E2-AB2F-B90AF26B5E84}">
       <p14:sectionLst xmlns:p14="http://schemas.microsoft.com/office/powerpoint/2010/main">
-        <p14:section name="도입" id="{26bec6f5-4130-88cc-84d4-d2200e3ffcd9}">
+        <p14:section name="도입" id="{29e7a90f-8efb-7439-e911-9efcc7f5588f}">
           <p14:sldIdLst>
             <p14:sldId id="256"/>
             <p14:sldId id="257"/>
           </p14:sldIdLst>
         </p14:section>
-        <p14:section name="개념" id="{079625e9-ae96-4555-c162-6d05fd8a7601}">
+        <p14:section name="개념" id="{88b33f93-b098-1250-8f68-842f5c7884f5}">
           <p14:sldIdLst>
             <p14:sldId id="258"/>
             <p14:sldId id="259"/>
             <p14:sldId id="262"/>
           </p14:sldIdLst>
         </p14:section>
-        <p14:section name="연습" id="{ce6cb79b-3434-1ef0-2ed7-ad40076d7ee6}">
+        <p14:section name="연습" id="{5403968e-be2e-640a-8456-71ff272aa233}">
           <p14:sldIdLst>
             <p14:sldId id="260"/>
             <p14:sldId id="261"/>
@@ -141,25 +141,25 @@
             <p14:sldId id="264"/>
           </p14:sldIdLst>
         </p14:section>
-        <p14:section name="개념" id="{40ff3634-aa06-ebf3-60de-ae04672a9477}">
+        <p14:section name="개념" id="{5833ed9d-f9b1-ba46-7372-5c9b58c8015f}">
           <p14:sldIdLst/>
         </p14:section>
-        <p14:section name="연습" id="{5be75e6e-f6e3-8d2c-2eb6-8bb689604591}">
+        <p14:section name="연습" id="{c1a8735a-1642-48bf-1a55-56bc2a5788e8}">
           <p14:sldIdLst/>
         </p14:section>
-        <p14:section name="확인" id="{d8ae34e5-60da-66bf-5f20-08a633d3d9ff}">
+        <p14:section name="확인" id="{7e19adce-8ae3-ac86-c189-faa2d7812f39}">
           <p14:sldIdLst>
             <p14:sldId id="265"/>
             <p14:sldId id="266"/>
             <p14:sldId id="267"/>
           </p14:sldIdLst>
         </p14:section>
-        <p14:section name="정리" id="{0eea26eb-d858-261b-ef7c-f6519f13cd72}">
+        <p14:section name="정리" id="{95eb8c97-47ea-bdf7-01cd-0067a49908a3}">
           <p14:sldIdLst>
             <p14:sldId id="268"/>
           </p14:sldIdLst>
         </p14:section>
-        <p14:section name="보충" id="{57138db0-1b7a-c396-9978-0d607e4d049b}">
+        <p14:section name="보충" id="{a5c26e79-6cfa-1432-b4f4-6b0b3340859e}">
           <p14:sldIdLst>
             <p14:sldId id="269"/>
           </p14:sldIdLst>
